--- a/AI漫剧制作课程/PPT课件/模块01-行业认知与趋势.pptx
+++ b/AI漫剧制作课程/PPT课件/模块01-行业认知与趋势.pptx
@@ -6301,7 +6301,7 @@
               </a:defRPr>
             </a:pPr>
             <a:r>
-              <a:t>✓</a:t>
+              <a:t>◆</a:t>
             </a:r>
           </a:p>
         </p:txBody>
@@ -8418,7 +8418,7 @@
               </a:defRPr>
             </a:pPr>
             <a:r>
-              <a:t>📋  本节内容</a:t>
+              <a:t>§  本节内容</a:t>
             </a:r>
           </a:p>
         </p:txBody>
@@ -30251,7 +30251,7 @@
               </a:defRPr>
             </a:pPr>
             <a:r>
-              <a:t>👤 个人创作者</a:t>
+              <a:t>◐ 个人创作者</a:t>
             </a:r>
           </a:p>
         </p:txBody>
@@ -31336,7 +31336,7 @@
               </a:defRPr>
             </a:pPr>
             <a:r>
-              <a:t>👥 小团队（3-5人）</a:t>
+              <a:t>◑ 小团队（3-5人）</a:t>
             </a:r>
           </a:p>
         </p:txBody>
@@ -34120,7 +34120,7 @@
               </a:defRPr>
             </a:pPr>
             <a:r>
-              <a:t>🛠️  本模块实操任务</a:t>
+              <a:t>◆  本模块实操任务</a:t>
             </a:r>
           </a:p>
         </p:txBody>
